--- a/src/figure/5_traj.pptx
+++ b/src/figure/5_traj.pptx
@@ -243,7 +243,7 @@
           <a:p>
             <a:fld id="{D215B4E7-CB62-1D48-9B6D-842A6792E445}" type="datetimeFigureOut">
               <a:rPr kumimoji="1" lang="zh-CN" altLang="en-US" smtClean="0"/>
-              <a:t>2026/5/10</a:t>
+              <a:t>2026/5/11</a:t>
             </a:fld>
             <a:endParaRPr kumimoji="1" lang="zh-CN" altLang="en-US"/>
           </a:p>
@@ -413,7 +413,7 @@
           <a:p>
             <a:fld id="{D215B4E7-CB62-1D48-9B6D-842A6792E445}" type="datetimeFigureOut">
               <a:rPr kumimoji="1" lang="zh-CN" altLang="en-US" smtClean="0"/>
-              <a:t>2026/5/10</a:t>
+              <a:t>2026/5/11</a:t>
             </a:fld>
             <a:endParaRPr kumimoji="1" lang="zh-CN" altLang="en-US"/>
           </a:p>
@@ -593,7 +593,7 @@
           <a:p>
             <a:fld id="{D215B4E7-CB62-1D48-9B6D-842A6792E445}" type="datetimeFigureOut">
               <a:rPr kumimoji="1" lang="zh-CN" altLang="en-US" smtClean="0"/>
-              <a:t>2026/5/10</a:t>
+              <a:t>2026/5/11</a:t>
             </a:fld>
             <a:endParaRPr kumimoji="1" lang="zh-CN" altLang="en-US"/>
           </a:p>
@@ -763,7 +763,7 @@
           <a:p>
             <a:fld id="{D215B4E7-CB62-1D48-9B6D-842A6792E445}" type="datetimeFigureOut">
               <a:rPr kumimoji="1" lang="zh-CN" altLang="en-US" smtClean="0"/>
-              <a:t>2026/5/10</a:t>
+              <a:t>2026/5/11</a:t>
             </a:fld>
             <a:endParaRPr kumimoji="1" lang="zh-CN" altLang="en-US"/>
           </a:p>
@@ -1009,7 +1009,7 @@
           <a:p>
             <a:fld id="{D215B4E7-CB62-1D48-9B6D-842A6792E445}" type="datetimeFigureOut">
               <a:rPr kumimoji="1" lang="zh-CN" altLang="en-US" smtClean="0"/>
-              <a:t>2026/5/10</a:t>
+              <a:t>2026/5/11</a:t>
             </a:fld>
             <a:endParaRPr kumimoji="1" lang="zh-CN" altLang="en-US"/>
           </a:p>
@@ -1241,7 +1241,7 @@
           <a:p>
             <a:fld id="{D215B4E7-CB62-1D48-9B6D-842A6792E445}" type="datetimeFigureOut">
               <a:rPr kumimoji="1" lang="zh-CN" altLang="en-US" smtClean="0"/>
-              <a:t>2026/5/10</a:t>
+              <a:t>2026/5/11</a:t>
             </a:fld>
             <a:endParaRPr kumimoji="1" lang="zh-CN" altLang="en-US"/>
           </a:p>
@@ -1608,7 +1608,7 @@
           <a:p>
             <a:fld id="{D215B4E7-CB62-1D48-9B6D-842A6792E445}" type="datetimeFigureOut">
               <a:rPr kumimoji="1" lang="zh-CN" altLang="en-US" smtClean="0"/>
-              <a:t>2026/5/10</a:t>
+              <a:t>2026/5/11</a:t>
             </a:fld>
             <a:endParaRPr kumimoji="1" lang="zh-CN" altLang="en-US"/>
           </a:p>
@@ -1726,7 +1726,7 @@
           <a:p>
             <a:fld id="{D215B4E7-CB62-1D48-9B6D-842A6792E445}" type="datetimeFigureOut">
               <a:rPr kumimoji="1" lang="zh-CN" altLang="en-US" smtClean="0"/>
-              <a:t>2026/5/10</a:t>
+              <a:t>2026/5/11</a:t>
             </a:fld>
             <a:endParaRPr kumimoji="1" lang="zh-CN" altLang="en-US"/>
           </a:p>
@@ -1821,7 +1821,7 @@
           <a:p>
             <a:fld id="{D215B4E7-CB62-1D48-9B6D-842A6792E445}" type="datetimeFigureOut">
               <a:rPr kumimoji="1" lang="zh-CN" altLang="en-US" smtClean="0"/>
-              <a:t>2026/5/10</a:t>
+              <a:t>2026/5/11</a:t>
             </a:fld>
             <a:endParaRPr kumimoji="1" lang="zh-CN" altLang="en-US"/>
           </a:p>
@@ -2098,7 +2098,7 @@
           <a:p>
             <a:fld id="{D215B4E7-CB62-1D48-9B6D-842A6792E445}" type="datetimeFigureOut">
               <a:rPr kumimoji="1" lang="zh-CN" altLang="en-US" smtClean="0"/>
-              <a:t>2026/5/10</a:t>
+              <a:t>2026/5/11</a:t>
             </a:fld>
             <a:endParaRPr kumimoji="1" lang="zh-CN" altLang="en-US"/>
           </a:p>
@@ -2355,7 +2355,7 @@
           <a:p>
             <a:fld id="{D215B4E7-CB62-1D48-9B6D-842A6792E445}" type="datetimeFigureOut">
               <a:rPr kumimoji="1" lang="zh-CN" altLang="en-US" smtClean="0"/>
-              <a:t>2026/5/10</a:t>
+              <a:t>2026/5/11</a:t>
             </a:fld>
             <a:endParaRPr kumimoji="1" lang="zh-CN" altLang="en-US"/>
           </a:p>
@@ -2568,7 +2568,7 @@
           <a:p>
             <a:fld id="{D215B4E7-CB62-1D48-9B6D-842A6792E445}" type="datetimeFigureOut">
               <a:rPr kumimoji="1" lang="zh-CN" altLang="en-US" smtClean="0"/>
-              <a:t>2026/5/10</a:t>
+              <a:t>2026/5/11</a:t>
             </a:fld>
             <a:endParaRPr kumimoji="1" lang="zh-CN" altLang="en-US"/>
           </a:p>
@@ -3037,7 +3037,7 @@
         </p:blipFill>
         <p:spPr>
           <a:xfrm>
-            <a:off x="259566" y="1826911"/>
+            <a:off x="259566" y="1828800"/>
             <a:ext cx="1593578" cy="1593578"/>
           </a:xfrm>
           <a:prstGeom prst="rect">
@@ -3181,7 +3181,7 @@
         </p:blipFill>
         <p:spPr>
           <a:xfrm>
-            <a:off x="3446726" y="1822718"/>
+            <a:off x="3446726" y="1828800"/>
             <a:ext cx="1593577" cy="1593577"/>
           </a:xfrm>
           <a:prstGeom prst="rect">
@@ -3253,7 +3253,7 @@
         </p:blipFill>
         <p:spPr>
           <a:xfrm>
-            <a:off x="253088" y="5393741"/>
+            <a:off x="259200" y="5393741"/>
             <a:ext cx="1598987" cy="1598987"/>
           </a:xfrm>
           <a:prstGeom prst="rect">
@@ -3289,7 +3289,7 @@
         </p:blipFill>
         <p:spPr>
           <a:xfrm>
-            <a:off x="1847735" y="3801237"/>
+            <a:off x="1854000" y="3794400"/>
             <a:ext cx="1592500" cy="1592500"/>
           </a:xfrm>
           <a:prstGeom prst="rect">
@@ -3325,7 +3325,7 @@
         </p:blipFill>
         <p:spPr>
           <a:xfrm>
-            <a:off x="1847741" y="5401010"/>
+            <a:off x="1854000" y="5392800"/>
             <a:ext cx="1592499" cy="1592499"/>
           </a:xfrm>
           <a:prstGeom prst="rect">
@@ -3361,7 +3361,7 @@
         </p:blipFill>
         <p:spPr>
           <a:xfrm>
-            <a:off x="3440470" y="3801243"/>
+            <a:off x="3445200" y="3794400"/>
             <a:ext cx="1592499" cy="1592499"/>
           </a:xfrm>
           <a:prstGeom prst="rect">
@@ -3397,7 +3397,7 @@
         </p:blipFill>
         <p:spPr>
           <a:xfrm>
-            <a:off x="3446721" y="5401003"/>
+            <a:off x="3446721" y="5392800"/>
             <a:ext cx="1593576" cy="1593576"/>
           </a:xfrm>
           <a:prstGeom prst="rect">
